--- a/templates/posts/october/_templates/6-reel-cover-and-caption-cards.pptx
+++ b/templates/posts/october/_templates/6-reel-cover-and-caption-cards.pptx
@@ -3717,7 +3717,7 @@
     <p:bg>
       <p:bgPr>
         <a:solidFill>
-          <a:srgbClr val="22371F"/>
+          <a:srgbClr val="1E3F1D"/>
         </a:solidFill>
         <a:effectLst/>
       </p:bgPr>
@@ -3829,7 +3829,7 @@
             </a:avLst>
           </a:prstGeom>
           <a:solidFill>
-            <a:srgbClr val="22371F">
+            <a:srgbClr val="1E3F1D">
               <a:alpha val="80000"/>
             </a:srgbClr>
           </a:solidFill>
@@ -3890,7 +3890,7 @@
             <a:r>
               <a:rPr sz="2200" b="1" i="0" spc="200">
                 <a:solidFill>
-                  <a:srgbClr val="DBE6A7"/>
+                  <a:srgbClr val="B1BCB1"/>
                 </a:solidFill>
                 <a:latin typeface="Montserrat"/>
               </a:rPr>
@@ -3916,7 +3916,7 @@
             </a:avLst>
           </a:prstGeom>
           <a:solidFill>
-            <a:srgbClr val="22371F">
+            <a:srgbClr val="1E3F1D">
               <a:alpha val="85000"/>
             </a:srgbClr>
           </a:solidFill>
@@ -3977,7 +3977,7 @@
             <a:r>
               <a:rPr sz="8400" b="1" i="0">
                 <a:solidFill>
-                  <a:srgbClr val="F4F1EA"/>
+                  <a:srgbClr val="F3F1EA"/>
                 </a:solidFill>
                 <a:latin typeface="Montserrat"/>
               </a:rPr>
@@ -4000,7 +4000,7 @@
     <p:bg>
       <p:bgPr>
         <a:solidFill>
-          <a:srgbClr val="22371F"/>
+          <a:srgbClr val="1E3F1D"/>
         </a:solidFill>
         <a:effectLst/>
       </p:bgPr>
@@ -4195,7 +4195,7 @@
             </a:avLst>
           </a:prstGeom>
           <a:solidFill>
-            <a:srgbClr val="22371F">
+            <a:srgbClr val="1E3F1D">
               <a:alpha val="90000"/>
             </a:srgbClr>
           </a:solidFill>
@@ -4256,7 +4256,7 @@
             <a:r>
               <a:rPr sz="2600" b="1" i="0" spc="200">
                 <a:solidFill>
-                  <a:srgbClr val="DBE6A7"/>
+                  <a:srgbClr val="B1BCB1"/>
                 </a:solidFill>
                 <a:latin typeface="Montserrat"/>
               </a:rPr>
@@ -4282,7 +4282,7 @@
             </a:avLst>
           </a:prstGeom>
           <a:solidFill>
-            <a:srgbClr val="22371F">
+            <a:srgbClr val="1E3F1D">
               <a:alpha val="90000"/>
             </a:srgbClr>
           </a:solidFill>
@@ -4343,7 +4343,7 @@
             <a:r>
               <a:rPr sz="2600" b="1" i="0" spc="200">
                 <a:solidFill>
-                  <a:srgbClr val="DBE6A7"/>
+                  <a:srgbClr val="B1BCB1"/>
                 </a:solidFill>
                 <a:latin typeface="Montserrat"/>
               </a:rPr>
@@ -4369,7 +4369,7 @@
             </a:avLst>
           </a:prstGeom>
           <a:solidFill>
-            <a:srgbClr val="22371F">
+            <a:srgbClr val="1E3F1D">
               <a:alpha val="85000"/>
             </a:srgbClr>
           </a:solidFill>
@@ -4430,7 +4430,7 @@
             <a:r>
               <a:rPr sz="8400" b="1" i="0">
                 <a:solidFill>
-                  <a:srgbClr val="F4F1EA"/>
+                  <a:srgbClr val="F3F1EA"/>
                 </a:solidFill>
                 <a:latin typeface="Montserrat"/>
               </a:rPr>
@@ -4453,7 +4453,7 @@
     <p:bg>
       <p:bgPr>
         <a:solidFill>
-          <a:srgbClr val="22371F"/>
+          <a:srgbClr val="1E3F1D"/>
         </a:solidFill>
         <a:effectLst/>
       </p:bgPr>
@@ -4578,7 +4578,7 @@
             <a:r>
               <a:rPr sz="7200" b="1" i="0">
                 <a:solidFill>
-                  <a:srgbClr val="F4F1EA"/>
+                  <a:srgbClr val="F3F1EA"/>
                 </a:solidFill>
                 <a:latin typeface="Montserrat"/>
               </a:rPr>
@@ -4636,11 +4636,11 @@
               <a:rPr sz="6400" b="1" i="0">
                 <a:ln w="57150">
                   <a:solidFill>
-                    <a:srgbClr val="22371F"/>
+                    <a:srgbClr val="1E3F1D"/>
                   </a:solidFill>
                 </a:ln>
                 <a:solidFill>
-                  <a:srgbClr val="F4F1EA"/>
+                  <a:srgbClr val="F3F1EA"/>
                 </a:solidFill>
                 <a:latin typeface="Montserrat"/>
               </a:rPr>
